--- a/presentations/20261030_進捗報告.pptx
+++ b/presentations/20261030_進捗報告.pptx
@@ -897,11 +897,11 @@
         </c:ser>
         <c:gapWidth val="50"/>
         <c:overlap val="-5"/>
-        <c:axId val="-2068027336"/>
-        <c:axId val="-2113994440"/>
+        <c:axId val="2068027336"/>
+        <c:axId val="2113994440"/>
       </c:barChart>
       <c:catAx>
-        <c:axId val="-2068027336"/>
+        <c:axId val="2068027336"/>
         <c:scaling>
           <c:orientation val="minMax"/>
         </c:scaling>
@@ -926,7 +926,7 @@
             </a:pPr>
           </a:p>
         </c:txPr>
-        <c:crossAx val="-2113994440"/>
+        <c:crossAx val="2113994440"/>
         <c:crosses val="autoZero"/>
         <c:auto val="1"/>
         <c:lblAlgn val="ctr"/>
@@ -934,7 +934,7 @@
         <c:noMultiLvlLbl val="0"/>
       </c:catAx>
       <c:valAx>
-        <c:axId val="-2113994440"/>
+        <c:axId val="2113994440"/>
         <c:scaling>
           <c:max val="50.0"/>
           <c:min val="0.0"/>
@@ -971,7 +971,7 @@
             </a:pPr>
           </a:p>
         </c:txPr>
-        <c:crossAx val="-2068027336"/>
+        <c:crossAx val="2068027336"/>
         <c:crosses val="autoZero"/>
         <c:majorUnit val="10.0"/>
       </c:valAx>
@@ -999,7 +999,6 @@
     <a:p>
       <a:pPr>
         <a:defRPr sz="1400">
-          <a:latin typeface="游明朝"/>
           <a:latin typeface="游明朝"/>
           <a:ea typeface="游明朝"/>
         </a:defRPr>
